--- a/public/level3/downloads/slides/Level3_Lesson5_Slides.pptx
+++ b/public/level3/downloads/slides/Level3_Lesson5_Slides.pptx
@@ -1486,7 +1486,7 @@
           </a:p>
           <a:p>
             <a:r>
-              <a:t>The audio (about 1:17) is coming soon. When it is ready, it plays the conversation once; press play again for play 2. Until then, read the listening script (at the end of these notes) with a volunteer.</a:t>
+              <a:t>The audio (L3_L5_listening.mp3, about 1:17) plays the conversation once. Press play again for play 2. A third play is fine if the class needs it.</a:t>
             </a:r>
           </a:p>
           <a:p>
@@ -1496,7 +1496,7 @@
           </a:p>
           <a:p>
             <a:r>
-              <a:t>Audio: the listening audio for this lesson (about 1:17) is coming soon. It will use computer-generated voices (Chatterbox TTS cloned from synthetic Kokoro-82M reference clips); no recordings of real people. Until it is ready, read the listening script (in the notes of the Before You Listen slide) with a volunteer. The names and the story are invented.</a:t>
+              <a:t>Audio: synthetic voices, computer-generated (Chatterbox TTS cloned from Kokoro-82M reference clips). No recordings of real people. The names and the story are invented.</a:t>
             </a:r>
           </a:p>
           <a:p>
@@ -1507,91 +1507,6 @@
           <a:p>
             <a:r>
               <a:t>Picture: Twemoji graphics by Twitter, Inc. and other contributors (https://github.com/jdecked/twemoji), CC BY 4.0 (https://creativecommons.org/licenses/by/4.0/); resized and combined, with speech bubbles, signs, and labels (images/CREDITS.md).</a:t>
-            </a:r>
-          </a:p>
-          <a:p>
-            <a:r>
-              <a:t>Listening script (the audio is coming soon; until then, read it aloud with a volunteer at a normal, friendly speed):</a:t>
-            </a:r>
-          </a:p>
-          <a:p>
-            <a:r>
-              <a:t>Narrator: Lesson five. Listening. Carmen and David are parents at Hillside School. Carmen is calling David. Listen.</a:t>
-            </a:r>
-          </a:p>
-          <a:p>
-            <a:r>
-              <a:t>Carmen: Hi, David. It's Carmen. It's about the family night at school on Friday.</a:t>
-            </a:r>
-          </a:p>
-          <a:p>
-            <a:r>
-              <a:t>David: Oh, right. How can I help?</a:t>
-            </a:r>
-          </a:p>
-          <a:p>
-            <a:r>
-              <a:t>Carmen: We need someone to set up the tables and chairs.</a:t>
-            </a:r>
-          </a:p>
-          <a:p>
-            <a:r>
-              <a:t>David: No problem. I'll set them up. I'll come early, at five.</a:t>
-            </a:r>
-          </a:p>
-          <a:p>
-            <a:r>
-              <a:t>Carmen: Thank you! And Rosa is going to bring pizza. She ordered it yesterday.</a:t>
-            </a:r>
-          </a:p>
-          <a:p>
-            <a:r>
-              <a:t>David: Great. What about drinks?</a:t>
-            </a:r>
-          </a:p>
-          <a:p>
-            <a:r>
-              <a:t>Carmen: Hmm. No one has the drinks yet.</a:t>
-            </a:r>
-          </a:p>
-          <a:p>
-            <a:r>
-              <a:t>David: OK, I'll bring the drinks. Juice and water.</a:t>
-            </a:r>
-          </a:p>
-          <a:p>
-            <a:r>
-              <a:t>Carmen: Perfect. Can you also make a flyer?</a:t>
-            </a:r>
-          </a:p>
-          <a:p>
-            <a:r>
-              <a:t>David: I'm going to be very busy at work this week. But my sister can make one. I'll ask her and call you back tonight.</a:t>
-            </a:r>
-          </a:p>
-          <a:p>
-            <a:r>
-              <a:t>Carmen: Will you call me before eight?</a:t>
-            </a:r>
-          </a:p>
-          <a:p>
-            <a:r>
-              <a:t>David: Yes, I will. I promise. Don't worry, I won't forget.</a:t>
-            </a:r>
-          </a:p>
-          <a:p>
-            <a:r>
-              <a:t>Carmen: Thanks, David. I'm going to clean up after the event.</a:t>
-            </a:r>
-          </a:p>
-          <a:p>
-            <a:r>
-              <a:t>David: I'll help you clean up, too. See you on Friday!</a:t>
-            </a:r>
-          </a:p>
-          <a:p>
-            <a:r>
-              <a:t>Narrator: That's the end of the listening.</a:t>
             </a:r>
           </a:p>
         </p:txBody>
@@ -2636,7 +2551,7 @@
           </a:p>
           <a:p>
             <a:r>
-              <a:t>Audio: the listening audio for this lesson (about 1:17) is coming soon. It will use computer-generated voices (Chatterbox TTS cloned from synthetic Kokoro-82M reference clips); no recordings of real people. Until it is ready, read the listening script (in the notes of the Before You Listen slide) with a volunteer. The names and the story are invented.</a:t>
+              <a:t>Audio: synthetic voices, computer-generated (Chatterbox TTS cloned from Kokoro-82M reference clips). No recordings of real people. The names and the story are invented.</a:t>
             </a:r>
           </a:p>
           <a:p>
@@ -31786,7 +31701,7 @@
                 <a:ea typeface="Lexend Deca" pitchFamily="34" charset="-122"/>
                 <a:cs typeface="Lexend Deca" pitchFamily="34" charset="-120"/>
               </a:rPr>
-              <a:t>Audio (coming soon): synthetic voices made with Chatterbox TTS (MIT License), cloned from short synthetic reference clips made with Kokoro-82M (Apache License 2.0). No recordings of real people. Each file will carry an inaudible Perth watermark marking it as AI-generated. Font: Lexend Deca (OFL 1.1).</a:t>
+              <a:t>Audio: synthetic voices made with Chatterbox TTS (MIT License), cloned from short synthetic reference clips made with Kokoro-82M (Apache License 2.0). No recordings of real people were used. Each file carries an inaudible Perth watermark marking it as AI-generated. Font: Lexend Deca (OFL 1.1).</a:t>
             </a:r>
             <a:endParaRPr lang="en-US" sz="1350" dirty="0" b="0"/>
           </a:p>
